--- a/slides/S8_slides.pptx
+++ b/slides/S8_slides.pptx
@@ -3113,7 +3113,7 @@
         <p:spPr>
           <a:xfrm>
             <a:off x="822960" y="2468880"/>
-            <a:ext cx="10545775" cy="1280160"/>
+            <a:ext cx="10545775" cy="1422400"/>
           </a:xfrm>
           <a:prstGeom prst="rect">
             <a:avLst/>
@@ -3167,7 +3167,7 @@
         </p:nvSpPr>
         <p:spPr>
           <a:xfrm>
-            <a:off x="822960" y="3657600"/>
+            <a:off x="822960" y="4119880"/>
             <a:ext cx="10545775" cy="914400"/>
           </a:xfrm>
           <a:prstGeom prst="rect">
@@ -3853,7 +3853,7 @@
         <p:spPr>
           <a:xfrm>
             <a:off x="822960" y="1188720"/>
-            <a:ext cx="10545775" cy="1645920"/>
+            <a:ext cx="10545775" cy="858520"/>
           </a:xfrm>
           <a:prstGeom prst="rect">
             <a:avLst/>
@@ -3907,8 +3907,8 @@
         </p:nvSpPr>
         <p:spPr>
           <a:xfrm>
-            <a:off x="822960" y="2834640"/>
-            <a:ext cx="10545775" cy="2194560"/>
+            <a:off x="822960" y="2367280"/>
+            <a:ext cx="10545775" cy="1375410"/>
           </a:xfrm>
           <a:prstGeom prst="rect">
             <a:avLst/>
